--- a/reports/Myntra_Data_Analysis_Presentation.pptx
+++ b/reports/Myntra_Data_Analysis_Presentation.pptx
@@ -3663,7 +3663,7 @@
               <a:defRPr sz="1600"/>
             </a:pPr>
             <a:r>
-              <a:t>Removed 3,546 records with invalid discount (&gt;100%)</a:t>
+              <a:t>Removed 3,546 records with inconsistent discount format (discount_percent &gt; 1)</a:t>
             </a:r>
           </a:p>
           <a:p>
